--- a/docs/presentation.pptx
+++ b/docs/presentation.pptx
@@ -9,8 +9,7 @@
     <p:sldId id="257" r:id="rId3"/>
     <p:sldId id="258" r:id="rId4"/>
     <p:sldId id="259" r:id="rId5"/>
-    <p:sldId id="260" r:id="rId6"/>
-    <p:sldId id="261" r:id="rId7"/>
+    <p:sldId id="261" r:id="rId6"/>
   </p:sldIdLst>
   <p:sldSz cx="12192000" cy="6858000"/>
   <p:notesSz cx="6858000" cy="9144000"/>
@@ -111,7 +110,7 @@
   </p:defaultTextStyle>
   <p:extLst>
     <p:ext uri="{EFAFB233-063F-42B5-8137-9DF3F51BA10A}">
-      <p15:sldGuideLst xmlns:p15="http://schemas.microsoft.com/office/powerpoint/2012/main"/>
+      <p15:sldGuideLst xmlns:p15="http://schemas.microsoft.com/office/powerpoint/2012/main" xmlns=""/>
     </p:ext>
   </p:extLst>
 </p:presentation>
@@ -248,6 +247,7 @@
           <a:p>
             <a:fld id="{13BD364F-289D-4D40-99F5-C85D2CDFB8F8}" type="datetimeFigureOut">
               <a:rPr lang="ru-RU" smtClean="0"/>
+              <a:pPr/>
               <a:t>12.05.2026</a:t>
             </a:fld>
             <a:endParaRPr lang="ru-RU"/>
@@ -290,6 +290,7 @@
           <a:p>
             <a:fld id="{41BB99B8-2B06-4573-B1B9-C05D8166549F}" type="slidenum">
               <a:rPr lang="ru-RU" smtClean="0"/>
+              <a:pPr/>
               <a:t>‹#›</a:t>
             </a:fld>
             <a:endParaRPr lang="ru-RU"/>
@@ -299,7 +300,7 @@
     </p:spTree>
     <p:extLst>
       <p:ext uri="{BB962C8B-B14F-4D97-AF65-F5344CB8AC3E}">
-        <p14:creationId xmlns:p14="http://schemas.microsoft.com/office/powerpoint/2010/main" val="505713649"/>
+        <p14:creationId xmlns:p14="http://schemas.microsoft.com/office/powerpoint/2010/main" xmlns="" val="505713649"/>
       </p:ext>
     </p:extLst>
   </p:cSld>
@@ -418,6 +419,7 @@
           <a:p>
             <a:fld id="{13BD364F-289D-4D40-99F5-C85D2CDFB8F8}" type="datetimeFigureOut">
               <a:rPr lang="ru-RU" smtClean="0"/>
+              <a:pPr/>
               <a:t>12.05.2026</a:t>
             </a:fld>
             <a:endParaRPr lang="ru-RU"/>
@@ -460,6 +462,7 @@
           <a:p>
             <a:fld id="{41BB99B8-2B06-4573-B1B9-C05D8166549F}" type="slidenum">
               <a:rPr lang="ru-RU" smtClean="0"/>
+              <a:pPr/>
               <a:t>‹#›</a:t>
             </a:fld>
             <a:endParaRPr lang="ru-RU"/>
@@ -469,7 +472,7 @@
     </p:spTree>
     <p:extLst>
       <p:ext uri="{BB962C8B-B14F-4D97-AF65-F5344CB8AC3E}">
-        <p14:creationId xmlns:p14="http://schemas.microsoft.com/office/powerpoint/2010/main" val="235749124"/>
+        <p14:creationId xmlns:p14="http://schemas.microsoft.com/office/powerpoint/2010/main" xmlns="" val="235749124"/>
       </p:ext>
     </p:extLst>
   </p:cSld>
@@ -598,6 +601,7 @@
           <a:p>
             <a:fld id="{13BD364F-289D-4D40-99F5-C85D2CDFB8F8}" type="datetimeFigureOut">
               <a:rPr lang="ru-RU" smtClean="0"/>
+              <a:pPr/>
               <a:t>12.05.2026</a:t>
             </a:fld>
             <a:endParaRPr lang="ru-RU"/>
@@ -640,6 +644,7 @@
           <a:p>
             <a:fld id="{41BB99B8-2B06-4573-B1B9-C05D8166549F}" type="slidenum">
               <a:rPr lang="ru-RU" smtClean="0"/>
+              <a:pPr/>
               <a:t>‹#›</a:t>
             </a:fld>
             <a:endParaRPr lang="ru-RU"/>
@@ -649,7 +654,7 @@
     </p:spTree>
     <p:extLst>
       <p:ext uri="{BB962C8B-B14F-4D97-AF65-F5344CB8AC3E}">
-        <p14:creationId xmlns:p14="http://schemas.microsoft.com/office/powerpoint/2010/main" val="435049930"/>
+        <p14:creationId xmlns:p14="http://schemas.microsoft.com/office/powerpoint/2010/main" xmlns="" val="435049930"/>
       </p:ext>
     </p:extLst>
   </p:cSld>
@@ -768,6 +773,7 @@
           <a:p>
             <a:fld id="{13BD364F-289D-4D40-99F5-C85D2CDFB8F8}" type="datetimeFigureOut">
               <a:rPr lang="ru-RU" smtClean="0"/>
+              <a:pPr/>
               <a:t>12.05.2026</a:t>
             </a:fld>
             <a:endParaRPr lang="ru-RU"/>
@@ -810,6 +816,7 @@
           <a:p>
             <a:fld id="{41BB99B8-2B06-4573-B1B9-C05D8166549F}" type="slidenum">
               <a:rPr lang="ru-RU" smtClean="0"/>
+              <a:pPr/>
               <a:t>‹#›</a:t>
             </a:fld>
             <a:endParaRPr lang="ru-RU"/>
@@ -819,7 +826,7 @@
     </p:spTree>
     <p:extLst>
       <p:ext uri="{BB962C8B-B14F-4D97-AF65-F5344CB8AC3E}">
-        <p14:creationId xmlns:p14="http://schemas.microsoft.com/office/powerpoint/2010/main" val="250082243"/>
+        <p14:creationId xmlns:p14="http://schemas.microsoft.com/office/powerpoint/2010/main" xmlns="" val="250082243"/>
       </p:ext>
     </p:extLst>
   </p:cSld>
@@ -1014,6 +1021,7 @@
           <a:p>
             <a:fld id="{13BD364F-289D-4D40-99F5-C85D2CDFB8F8}" type="datetimeFigureOut">
               <a:rPr lang="ru-RU" smtClean="0"/>
+              <a:pPr/>
               <a:t>12.05.2026</a:t>
             </a:fld>
             <a:endParaRPr lang="ru-RU"/>
@@ -1056,6 +1064,7 @@
           <a:p>
             <a:fld id="{41BB99B8-2B06-4573-B1B9-C05D8166549F}" type="slidenum">
               <a:rPr lang="ru-RU" smtClean="0"/>
+              <a:pPr/>
               <a:t>‹#›</a:t>
             </a:fld>
             <a:endParaRPr lang="ru-RU"/>
@@ -1065,7 +1074,7 @@
     </p:spTree>
     <p:extLst>
       <p:ext uri="{BB962C8B-B14F-4D97-AF65-F5344CB8AC3E}">
-        <p14:creationId xmlns:p14="http://schemas.microsoft.com/office/powerpoint/2010/main" val="2795796135"/>
+        <p14:creationId xmlns:p14="http://schemas.microsoft.com/office/powerpoint/2010/main" xmlns="" val="2795796135"/>
       </p:ext>
     </p:extLst>
   </p:cSld>
@@ -1246,6 +1255,7 @@
           <a:p>
             <a:fld id="{13BD364F-289D-4D40-99F5-C85D2CDFB8F8}" type="datetimeFigureOut">
               <a:rPr lang="ru-RU" smtClean="0"/>
+              <a:pPr/>
               <a:t>12.05.2026</a:t>
             </a:fld>
             <a:endParaRPr lang="ru-RU"/>
@@ -1288,6 +1298,7 @@
           <a:p>
             <a:fld id="{41BB99B8-2B06-4573-B1B9-C05D8166549F}" type="slidenum">
               <a:rPr lang="ru-RU" smtClean="0"/>
+              <a:pPr/>
               <a:t>‹#›</a:t>
             </a:fld>
             <a:endParaRPr lang="ru-RU"/>
@@ -1297,7 +1308,7 @@
     </p:spTree>
     <p:extLst>
       <p:ext uri="{BB962C8B-B14F-4D97-AF65-F5344CB8AC3E}">
-        <p14:creationId xmlns:p14="http://schemas.microsoft.com/office/powerpoint/2010/main" val="447605595"/>
+        <p14:creationId xmlns:p14="http://schemas.microsoft.com/office/powerpoint/2010/main" xmlns="" val="447605595"/>
       </p:ext>
     </p:extLst>
   </p:cSld>
@@ -1613,6 +1624,7 @@
           <a:p>
             <a:fld id="{13BD364F-289D-4D40-99F5-C85D2CDFB8F8}" type="datetimeFigureOut">
               <a:rPr lang="ru-RU" smtClean="0"/>
+              <a:pPr/>
               <a:t>12.05.2026</a:t>
             </a:fld>
             <a:endParaRPr lang="ru-RU"/>
@@ -1655,6 +1667,7 @@
           <a:p>
             <a:fld id="{41BB99B8-2B06-4573-B1B9-C05D8166549F}" type="slidenum">
               <a:rPr lang="ru-RU" smtClean="0"/>
+              <a:pPr/>
               <a:t>‹#›</a:t>
             </a:fld>
             <a:endParaRPr lang="ru-RU"/>
@@ -1664,7 +1677,7 @@
     </p:spTree>
     <p:extLst>
       <p:ext uri="{BB962C8B-B14F-4D97-AF65-F5344CB8AC3E}">
-        <p14:creationId xmlns:p14="http://schemas.microsoft.com/office/powerpoint/2010/main" val="4088655650"/>
+        <p14:creationId xmlns:p14="http://schemas.microsoft.com/office/powerpoint/2010/main" xmlns="" val="4088655650"/>
       </p:ext>
     </p:extLst>
   </p:cSld>
@@ -1731,6 +1744,7 @@
           <a:p>
             <a:fld id="{13BD364F-289D-4D40-99F5-C85D2CDFB8F8}" type="datetimeFigureOut">
               <a:rPr lang="ru-RU" smtClean="0"/>
+              <a:pPr/>
               <a:t>12.05.2026</a:t>
             </a:fld>
             <a:endParaRPr lang="ru-RU"/>
@@ -1773,6 +1787,7 @@
           <a:p>
             <a:fld id="{41BB99B8-2B06-4573-B1B9-C05D8166549F}" type="slidenum">
               <a:rPr lang="ru-RU" smtClean="0"/>
+              <a:pPr/>
               <a:t>‹#›</a:t>
             </a:fld>
             <a:endParaRPr lang="ru-RU"/>
@@ -1782,7 +1797,7 @@
     </p:spTree>
     <p:extLst>
       <p:ext uri="{BB962C8B-B14F-4D97-AF65-F5344CB8AC3E}">
-        <p14:creationId xmlns:p14="http://schemas.microsoft.com/office/powerpoint/2010/main" val="1268317257"/>
+        <p14:creationId xmlns:p14="http://schemas.microsoft.com/office/powerpoint/2010/main" xmlns="" val="1268317257"/>
       </p:ext>
     </p:extLst>
   </p:cSld>
@@ -1826,6 +1841,7 @@
           <a:p>
             <a:fld id="{13BD364F-289D-4D40-99F5-C85D2CDFB8F8}" type="datetimeFigureOut">
               <a:rPr lang="ru-RU" smtClean="0"/>
+              <a:pPr/>
               <a:t>12.05.2026</a:t>
             </a:fld>
             <a:endParaRPr lang="ru-RU"/>
@@ -1868,6 +1884,7 @@
           <a:p>
             <a:fld id="{41BB99B8-2B06-4573-B1B9-C05D8166549F}" type="slidenum">
               <a:rPr lang="ru-RU" smtClean="0"/>
+              <a:pPr/>
               <a:t>‹#›</a:t>
             </a:fld>
             <a:endParaRPr lang="ru-RU"/>
@@ -1877,7 +1894,7 @@
     </p:spTree>
     <p:extLst>
       <p:ext uri="{BB962C8B-B14F-4D97-AF65-F5344CB8AC3E}">
-        <p14:creationId xmlns:p14="http://schemas.microsoft.com/office/powerpoint/2010/main" val="188980903"/>
+        <p14:creationId xmlns:p14="http://schemas.microsoft.com/office/powerpoint/2010/main" xmlns="" val="188980903"/>
       </p:ext>
     </p:extLst>
   </p:cSld>
@@ -2103,6 +2120,7 @@
           <a:p>
             <a:fld id="{13BD364F-289D-4D40-99F5-C85D2CDFB8F8}" type="datetimeFigureOut">
               <a:rPr lang="ru-RU" smtClean="0"/>
+              <a:pPr/>
               <a:t>12.05.2026</a:t>
             </a:fld>
             <a:endParaRPr lang="ru-RU"/>
@@ -2145,6 +2163,7 @@
           <a:p>
             <a:fld id="{41BB99B8-2B06-4573-B1B9-C05D8166549F}" type="slidenum">
               <a:rPr lang="ru-RU" smtClean="0"/>
+              <a:pPr/>
               <a:t>‹#›</a:t>
             </a:fld>
             <a:endParaRPr lang="ru-RU"/>
@@ -2154,7 +2173,7 @@
     </p:spTree>
     <p:extLst>
       <p:ext uri="{BB962C8B-B14F-4D97-AF65-F5344CB8AC3E}">
-        <p14:creationId xmlns:p14="http://schemas.microsoft.com/office/powerpoint/2010/main" val="2631787757"/>
+        <p14:creationId xmlns:p14="http://schemas.microsoft.com/office/powerpoint/2010/main" xmlns="" val="2631787757"/>
       </p:ext>
     </p:extLst>
   </p:cSld>
@@ -2356,6 +2375,7 @@
           <a:p>
             <a:fld id="{13BD364F-289D-4D40-99F5-C85D2CDFB8F8}" type="datetimeFigureOut">
               <a:rPr lang="ru-RU" smtClean="0"/>
+              <a:pPr/>
               <a:t>12.05.2026</a:t>
             </a:fld>
             <a:endParaRPr lang="ru-RU"/>
@@ -2398,6 +2418,7 @@
           <a:p>
             <a:fld id="{41BB99B8-2B06-4573-B1B9-C05D8166549F}" type="slidenum">
               <a:rPr lang="ru-RU" smtClean="0"/>
+              <a:pPr/>
               <a:t>‹#›</a:t>
             </a:fld>
             <a:endParaRPr lang="ru-RU"/>
@@ -2407,7 +2428,7 @@
     </p:spTree>
     <p:extLst>
       <p:ext uri="{BB962C8B-B14F-4D97-AF65-F5344CB8AC3E}">
-        <p14:creationId xmlns:p14="http://schemas.microsoft.com/office/powerpoint/2010/main" val="3324265816"/>
+        <p14:creationId xmlns:p14="http://schemas.microsoft.com/office/powerpoint/2010/main" xmlns="" val="3324265816"/>
       </p:ext>
     </p:extLst>
   </p:cSld>
@@ -2569,6 +2590,7 @@
           <a:p>
             <a:fld id="{13BD364F-289D-4D40-99F5-C85D2CDFB8F8}" type="datetimeFigureOut">
               <a:rPr lang="ru-RU" smtClean="0"/>
+              <a:pPr/>
               <a:t>12.05.2026</a:t>
             </a:fld>
             <a:endParaRPr lang="ru-RU"/>
@@ -2647,6 +2669,7 @@
           <a:p>
             <a:fld id="{41BB99B8-2B06-4573-B1B9-C05D8166549F}" type="slidenum">
               <a:rPr lang="ru-RU" smtClean="0"/>
+              <a:pPr/>
               <a:t>‹#›</a:t>
             </a:fld>
             <a:endParaRPr lang="ru-RU"/>
@@ -2656,7 +2679,7 @@
     </p:spTree>
     <p:extLst>
       <p:ext uri="{BB962C8B-B14F-4D97-AF65-F5344CB8AC3E}">
-        <p14:creationId xmlns:p14="http://schemas.microsoft.com/office/powerpoint/2010/main" val="706335842"/>
+        <p14:creationId xmlns:p14="http://schemas.microsoft.com/office/powerpoint/2010/main" xmlns="" val="706335842"/>
       </p:ext>
     </p:extLst>
   </p:cSld>
@@ -3039,7 +3062,7 @@
     </p:spTree>
     <p:extLst>
       <p:ext uri="{BB962C8B-B14F-4D97-AF65-F5344CB8AC3E}">
-        <p14:creationId xmlns:p14="http://schemas.microsoft.com/office/powerpoint/2010/main" val="396284269"/>
+        <p14:creationId xmlns:p14="http://schemas.microsoft.com/office/powerpoint/2010/main" xmlns="" val="396284269"/>
       </p:ext>
     </p:extLst>
   </p:cSld>
@@ -3115,7 +3138,7 @@
     </p:spTree>
     <p:extLst>
       <p:ext uri="{BB962C8B-B14F-4D97-AF65-F5344CB8AC3E}">
-        <p14:creationId xmlns:p14="http://schemas.microsoft.com/office/powerpoint/2010/main" val="2856965319"/>
+        <p14:creationId xmlns:p14="http://schemas.microsoft.com/office/powerpoint/2010/main" xmlns="" val="2856965319"/>
       </p:ext>
     </p:extLst>
   </p:cSld>
@@ -3190,26 +3213,9 @@
           <a:bodyPr/>
           <a:lstStyle/>
           <a:p>
-            <a:r>
-              <a:rPr lang="ru-RU" dirty="0" smtClean="0"/>
-              <a:t>Игры в папке </a:t>
-            </a:r>
-            <a:r>
-              <a:rPr lang="en-US" dirty="0" smtClean="0"/>
-              <a:t>games, </a:t>
-            </a:r>
-            <a:r>
-              <a:rPr lang="ru-RU" dirty="0" smtClean="0"/>
-              <a:t>каждая называется по названию подпапки. Карты в папке </a:t>
-            </a:r>
-            <a:r>
-              <a:rPr lang="en-US" dirty="0" smtClean="0"/>
-              <a:t>levels</a:t>
-            </a:r>
-            <a:r>
-              <a:rPr lang="ru-RU" dirty="0" smtClean="0"/>
-              <a:t>. Игры должны сами находиться.</a:t>
-            </a:r>
+            <a:pPr>
+              <a:buNone/>
+            </a:pPr>
             <a:endParaRPr lang="ru-RU" dirty="0"/>
           </a:p>
         </p:txBody>
@@ -3241,7 +3247,7 @@
     </p:spTree>
     <p:extLst>
       <p:ext uri="{BB962C8B-B14F-4D97-AF65-F5344CB8AC3E}">
-        <p14:creationId xmlns:p14="http://schemas.microsoft.com/office/powerpoint/2010/main" val="1909800771"/>
+        <p14:creationId xmlns:p14="http://schemas.microsoft.com/office/powerpoint/2010/main" xmlns="" val="1909800771"/>
       </p:ext>
     </p:extLst>
   </p:cSld>
@@ -3285,11 +3291,7 @@
           <a:p>
             <a:r>
               <a:rPr lang="ru-RU" smtClean="0"/>
-              <a:t>Д</a:t>
-            </a:r>
-            <a:r>
-              <a:rPr lang="ru-RU" smtClean="0"/>
-              <a:t>емонстрация</a:t>
+              <a:t>Демонстрация</a:t>
             </a:r>
             <a:endParaRPr lang="ru-RU" dirty="0"/>
           </a:p>
@@ -3317,7 +3319,7 @@
     </p:spTree>
     <p:extLst>
       <p:ext uri="{BB962C8B-B14F-4D97-AF65-F5344CB8AC3E}">
-        <p14:creationId xmlns:p14="http://schemas.microsoft.com/office/powerpoint/2010/main" val="2180299186"/>
+        <p14:creationId xmlns:p14="http://schemas.microsoft.com/office/powerpoint/2010/main" xmlns="" val="2180299186"/>
       </p:ext>
     </p:extLst>
   </p:cSld>
@@ -3354,118 +3356,6 @@
             <p:ph type="title"/>
           </p:nvPr>
         </p:nvSpPr>
-        <p:spPr/>
-        <p:txBody>
-          <a:bodyPr/>
-          <a:lstStyle/>
-          <a:p>
-            <a:r>
-              <a:rPr lang="ru-RU" dirty="0" smtClean="0"/>
-              <a:t>А теперь предыстория</a:t>
-            </a:r>
-            <a:endParaRPr lang="ru-RU" dirty="0"/>
-          </a:p>
-        </p:txBody>
-      </p:sp>
-      <p:pic>
-        <p:nvPicPr>
-          <p:cNvPr id="4" name="Объект 3"/>
-          <p:cNvPicPr>
-            <a:picLocks noGrp="1" noChangeAspect="1"/>
-          </p:cNvPicPr>
-          <p:nvPr>
-            <p:ph idx="1"/>
-          </p:nvPr>
-        </p:nvPicPr>
-        <p:blipFill>
-          <a:blip r:embed="rId2">
-            <a:extLst>
-              <a:ext uri="{28A0092B-C50C-407E-A947-70E740481C1C}">
-                <a14:useLocalDpi xmlns:a14="http://schemas.microsoft.com/office/drawing/2010/main" val="0"/>
-              </a:ext>
-            </a:extLst>
-          </a:blip>
-          <a:stretch>
-            <a:fillRect/>
-          </a:stretch>
-        </p:blipFill>
-        <p:spPr>
-          <a:xfrm>
-            <a:off x="993653" y="1440831"/>
-            <a:ext cx="4892464" cy="3292125"/>
-          </a:xfrm>
-        </p:spPr>
-      </p:pic>
-      <p:pic>
-        <p:nvPicPr>
-          <p:cNvPr id="5" name="Рисунок 4"/>
-          <p:cNvPicPr>
-            <a:picLocks noChangeAspect="1"/>
-          </p:cNvPicPr>
-          <p:nvPr/>
-        </p:nvPicPr>
-        <p:blipFill>
-          <a:blip r:embed="rId3">
-            <a:extLst>
-              <a:ext uri="{28A0092B-C50C-407E-A947-70E740481C1C}">
-                <a14:useLocalDpi xmlns:a14="http://schemas.microsoft.com/office/drawing/2010/main" val="0"/>
-              </a:ext>
-            </a:extLst>
-          </a:blip>
-          <a:stretch>
-            <a:fillRect/>
-          </a:stretch>
-        </p:blipFill>
-        <p:spPr>
-          <a:xfrm>
-            <a:off x="6274042" y="2865120"/>
-            <a:ext cx="5208210" cy="2929618"/>
-          </a:xfrm>
-          <a:prstGeom prst="rect">
-            <a:avLst/>
-          </a:prstGeom>
-        </p:spPr>
-      </p:pic>
-    </p:spTree>
-    <p:extLst>
-      <p:ext uri="{BB962C8B-B14F-4D97-AF65-F5344CB8AC3E}">
-        <p14:creationId xmlns:p14="http://schemas.microsoft.com/office/powerpoint/2010/main" val="594228728"/>
-      </p:ext>
-    </p:extLst>
-  </p:cSld>
-  <p:clrMapOvr>
-    <a:masterClrMapping/>
-  </p:clrMapOvr>
-</p:sld>
-</file>
-
-<file path=ppt/slides/slide6.xml><?xml version="1.0" encoding="utf-8"?>
-<p:sld xmlns:a="http://schemas.openxmlformats.org/drawingml/2006/main" xmlns:r="http://schemas.openxmlformats.org/officeDocument/2006/relationships" xmlns:p="http://schemas.openxmlformats.org/presentationml/2006/main">
-  <p:cSld>
-    <p:spTree>
-      <p:nvGrpSpPr>
-        <p:cNvPr id="1" name=""/>
-        <p:cNvGrpSpPr/>
-        <p:nvPr/>
-      </p:nvGrpSpPr>
-      <p:grpSpPr>
-        <a:xfrm>
-          <a:off x="0" y="0"/>
-          <a:ext cx="0" cy="0"/>
-          <a:chOff x="0" y="0"/>
-          <a:chExt cx="0" cy="0"/>
-        </a:xfrm>
-      </p:grpSpPr>
-      <p:sp>
-        <p:nvSpPr>
-          <p:cNvPr id="2" name="Заголовок 1"/>
-          <p:cNvSpPr>
-            <a:spLocks noGrp="1"/>
-          </p:cNvSpPr>
-          <p:nvPr>
-            <p:ph type="title"/>
-          </p:nvPr>
-        </p:nvSpPr>
         <p:spPr>
           <a:xfrm>
             <a:off x="3163388" y="2725147"/>
@@ -3487,7 +3377,7 @@
     </p:spTree>
     <p:extLst>
       <p:ext uri="{BB962C8B-B14F-4D97-AF65-F5344CB8AC3E}">
-        <p14:creationId xmlns:p14="http://schemas.microsoft.com/office/powerpoint/2010/main" val="4154630238"/>
+        <p14:creationId xmlns:p14="http://schemas.microsoft.com/office/powerpoint/2010/main" xmlns="" val="4154630238"/>
       </p:ext>
     </p:extLst>
   </p:cSld>
@@ -3540,7 +3430,7 @@
     </a:clrScheme>
     <a:fontScheme name="Стандартная">
       <a:majorFont>
-        <a:latin typeface="Calibri Light" panose="020F0302020204030204"/>
+        <a:latin typeface="Calibri Light"/>
         <a:ea typeface=""/>
         <a:cs typeface=""/>
         <a:font script="Jpan" typeface="游ゴシック Light"/>
@@ -3575,7 +3465,7 @@
         <a:font script="Geor" typeface="Sylfaen"/>
       </a:majorFont>
       <a:minorFont>
-        <a:latin typeface="Calibri" panose="020F0502020204030204"/>
+        <a:latin typeface="Calibri"/>
         <a:ea typeface=""/>
         <a:cs typeface=""/>
         <a:font script="Jpan" typeface="游ゴシック"/>
@@ -3752,7 +3642,7 @@
   <a:extraClrSchemeLst/>
   <a:extLst>
     <a:ext uri="{05A4C25C-085E-4340-85A3-A5531E510DB2}">
-      <thm15:themeFamily xmlns:thm15="http://schemas.microsoft.com/office/thememl/2012/main" name="Office Theme" id="{62F939B6-93AF-4DB8-9C6B-D6C7DFDC589F}" vid="{4A3C46E8-61CC-4603-A589-7422A47A8E4A}"/>
+      <thm15:themeFamily xmlns:thm15="http://schemas.microsoft.com/office/thememl/2012/main" xmlns="" name="Office Theme" id="{62F939B6-93AF-4DB8-9C6B-D6C7DFDC589F}" vid="{4A3C46E8-61CC-4603-A589-7422A47A8E4A}"/>
     </a:ext>
   </a:extLst>
 </a:theme>
